--- a/public/videos/repositories/hotpapi-web/hotpapi-web-tech-preview.pptx
+++ b/public/videos/repositories/hotpapi-web/hotpapi-web-tech-preview.pptx
@@ -134,7 +134,7 @@
           <p:cNvPr id="2" name="タイトル 1">
             <a:extLst>
               <a:ext uri="{FF2B5EF4-FFF2-40B4-BE49-F238E27FC236}">
-                <a16:creationId xmlns:a16="http://schemas.microsoft.com/office/drawing/2014/main" id="{C66CBC4B-4221-4E5B-AA1E-0AB37BDEAC1C}"/>
+                <a16:creationId xmlns:a16="http://schemas.microsoft.com/office/drawing/2014/main" id="{C79171E1-6824-52D8-C537-38459F5B408C}"/>
               </a:ext>
             </a:extLst>
           </p:cNvPr>
@@ -171,7 +171,7 @@
           <p:cNvPr id="3" name="字幕 2">
             <a:extLst>
               <a:ext uri="{FF2B5EF4-FFF2-40B4-BE49-F238E27FC236}">
-                <a16:creationId xmlns:a16="http://schemas.microsoft.com/office/drawing/2014/main" id="{0CA88357-C5BB-C571-08EB-44A8A6DCA3E3}"/>
+                <a16:creationId xmlns:a16="http://schemas.microsoft.com/office/drawing/2014/main" id="{9756CB09-C3F8-5BB2-6F57-05FB89B89319}"/>
               </a:ext>
             </a:extLst>
           </p:cNvPr>
@@ -241,7 +241,7 @@
           <p:cNvPr id="4" name="日付プレースホルダー 3">
             <a:extLst>
               <a:ext uri="{FF2B5EF4-FFF2-40B4-BE49-F238E27FC236}">
-                <a16:creationId xmlns:a16="http://schemas.microsoft.com/office/drawing/2014/main" id="{2F7018FB-2EE1-02B3-E362-E22A133C7872}"/>
+                <a16:creationId xmlns:a16="http://schemas.microsoft.com/office/drawing/2014/main" id="{89DC19F1-4FB7-AAC5-6A8D-3351BC3F59C9}"/>
               </a:ext>
             </a:extLst>
           </p:cNvPr>
@@ -257,7 +257,7 @@
           <a:bodyPr/>
           <a:lstStyle/>
           <a:p>
-            <a:fld id="{A231A90A-919E-4E75-A57E-281B475D883F}" type="datetimeFigureOut">
+            <a:fld id="{09D9434B-20C4-4F04-AD68-073D04FFDACE}" type="datetimeFigureOut">
               <a:rPr kumimoji="1" lang="ja-JP" altLang="en-US" smtClean="0"/>
               <a:t>2026/7/30</a:t>
             </a:fld>
@@ -270,7 +270,7 @@
           <p:cNvPr id="5" name="フッター プレースホルダー 4">
             <a:extLst>
               <a:ext uri="{FF2B5EF4-FFF2-40B4-BE49-F238E27FC236}">
-                <a16:creationId xmlns:a16="http://schemas.microsoft.com/office/drawing/2014/main" id="{ECA235E1-C16A-E86A-99D4-DBD41371B53A}"/>
+                <a16:creationId xmlns:a16="http://schemas.microsoft.com/office/drawing/2014/main" id="{15F26480-B761-33D2-BFFF-1AF2A6C0047C}"/>
               </a:ext>
             </a:extLst>
           </p:cNvPr>
@@ -295,7 +295,7 @@
           <p:cNvPr id="6" name="スライド番号プレースホルダー 5">
             <a:extLst>
               <a:ext uri="{FF2B5EF4-FFF2-40B4-BE49-F238E27FC236}">
-                <a16:creationId xmlns:a16="http://schemas.microsoft.com/office/drawing/2014/main" id="{82D1BE0B-AB10-C132-681D-54C598B0457A}"/>
+                <a16:creationId xmlns:a16="http://schemas.microsoft.com/office/drawing/2014/main" id="{9D2609DE-8AD5-A658-95EB-F2366018A230}"/>
               </a:ext>
             </a:extLst>
           </p:cNvPr>
@@ -311,7 +311,7 @@
           <a:bodyPr/>
           <a:lstStyle/>
           <a:p>
-            <a:fld id="{CC7124A5-1AAF-4F4C-9983-7B0A836199C1}" type="slidenum">
+            <a:fld id="{285FFB73-0918-41E0-A07F-0F7B1C9A2F21}" type="slidenum">
               <a:rPr kumimoji="1" lang="ja-JP" altLang="en-US" smtClean="0"/>
               <a:t>‹#›</a:t>
             </a:fld>
@@ -322,7 +322,7 @@
     </p:spTree>
     <p:extLst>
       <p:ext uri="{BB962C8B-B14F-4D97-AF65-F5344CB8AC3E}">
-        <p14:creationId xmlns:p14="http://schemas.microsoft.com/office/powerpoint/2010/main" val="1777914528"/>
+        <p14:creationId xmlns:p14="http://schemas.microsoft.com/office/powerpoint/2010/main" val="553783882"/>
       </p:ext>
     </p:extLst>
   </p:cSld>
@@ -354,7 +354,7 @@
           <p:cNvPr id="2" name="タイトル 1">
             <a:extLst>
               <a:ext uri="{FF2B5EF4-FFF2-40B4-BE49-F238E27FC236}">
-                <a16:creationId xmlns:a16="http://schemas.microsoft.com/office/drawing/2014/main" id="{B2DDAAAE-D565-CEC0-CDF3-9AFB370E5A60}"/>
+                <a16:creationId xmlns:a16="http://schemas.microsoft.com/office/drawing/2014/main" id="{5FF0AE2D-059A-9DD0-F8D4-EB0346AA5918}"/>
               </a:ext>
             </a:extLst>
           </p:cNvPr>
@@ -382,7 +382,7 @@
           <p:cNvPr id="3" name="縦書きテキスト プレースホルダー 2">
             <a:extLst>
               <a:ext uri="{FF2B5EF4-FFF2-40B4-BE49-F238E27FC236}">
-                <a16:creationId xmlns:a16="http://schemas.microsoft.com/office/drawing/2014/main" id="{01078442-B07F-1DF9-1515-016EDB55EB38}"/>
+                <a16:creationId xmlns:a16="http://schemas.microsoft.com/office/drawing/2014/main" id="{969A5F12-21B7-D352-74FF-0D9929070099}"/>
               </a:ext>
             </a:extLst>
           </p:cNvPr>
@@ -471,7 +471,7 @@
           <p:cNvPr id="4" name="日付プレースホルダー 3">
             <a:extLst>
               <a:ext uri="{FF2B5EF4-FFF2-40B4-BE49-F238E27FC236}">
-                <a16:creationId xmlns:a16="http://schemas.microsoft.com/office/drawing/2014/main" id="{F2370E61-4599-C4D5-EC5A-06006F547641}"/>
+                <a16:creationId xmlns:a16="http://schemas.microsoft.com/office/drawing/2014/main" id="{785F09BA-0726-FF5E-22BF-891ACE9E165E}"/>
               </a:ext>
             </a:extLst>
           </p:cNvPr>
@@ -487,7 +487,7 @@
           <a:bodyPr/>
           <a:lstStyle/>
           <a:p>
-            <a:fld id="{A231A90A-919E-4E75-A57E-281B475D883F}" type="datetimeFigureOut">
+            <a:fld id="{09D9434B-20C4-4F04-AD68-073D04FFDACE}" type="datetimeFigureOut">
               <a:rPr kumimoji="1" lang="ja-JP" altLang="en-US" smtClean="0"/>
               <a:t>2026/7/30</a:t>
             </a:fld>
@@ -500,7 +500,7 @@
           <p:cNvPr id="5" name="フッター プレースホルダー 4">
             <a:extLst>
               <a:ext uri="{FF2B5EF4-FFF2-40B4-BE49-F238E27FC236}">
-                <a16:creationId xmlns:a16="http://schemas.microsoft.com/office/drawing/2014/main" id="{97919110-854B-6EAF-7FB5-7359474B9428}"/>
+                <a16:creationId xmlns:a16="http://schemas.microsoft.com/office/drawing/2014/main" id="{3E4564A6-9991-CA44-3530-0995E8B77D89}"/>
               </a:ext>
             </a:extLst>
           </p:cNvPr>
@@ -525,7 +525,7 @@
           <p:cNvPr id="6" name="スライド番号プレースホルダー 5">
             <a:extLst>
               <a:ext uri="{FF2B5EF4-FFF2-40B4-BE49-F238E27FC236}">
-                <a16:creationId xmlns:a16="http://schemas.microsoft.com/office/drawing/2014/main" id="{A679AF05-1511-0B2E-D84A-0D6B3F2F9D59}"/>
+                <a16:creationId xmlns:a16="http://schemas.microsoft.com/office/drawing/2014/main" id="{DD7EFF4C-0D0F-4304-6B35-2A91EF1BEC83}"/>
               </a:ext>
             </a:extLst>
           </p:cNvPr>
@@ -541,7 +541,7 @@
           <a:bodyPr/>
           <a:lstStyle/>
           <a:p>
-            <a:fld id="{CC7124A5-1AAF-4F4C-9983-7B0A836199C1}" type="slidenum">
+            <a:fld id="{285FFB73-0918-41E0-A07F-0F7B1C9A2F21}" type="slidenum">
               <a:rPr kumimoji="1" lang="ja-JP" altLang="en-US" smtClean="0"/>
               <a:t>‹#›</a:t>
             </a:fld>
@@ -552,7 +552,7 @@
     </p:spTree>
     <p:extLst>
       <p:ext uri="{BB962C8B-B14F-4D97-AF65-F5344CB8AC3E}">
-        <p14:creationId xmlns:p14="http://schemas.microsoft.com/office/powerpoint/2010/main" val="1503391069"/>
+        <p14:creationId xmlns:p14="http://schemas.microsoft.com/office/powerpoint/2010/main" val="3588446574"/>
       </p:ext>
     </p:extLst>
   </p:cSld>
@@ -584,7 +584,7 @@
           <p:cNvPr id="2" name="縦書きタイトル 1">
             <a:extLst>
               <a:ext uri="{FF2B5EF4-FFF2-40B4-BE49-F238E27FC236}">
-                <a16:creationId xmlns:a16="http://schemas.microsoft.com/office/drawing/2014/main" id="{E1E555AE-FFB6-549F-C53B-C6A77F2A560A}"/>
+                <a16:creationId xmlns:a16="http://schemas.microsoft.com/office/drawing/2014/main" id="{A62E68A0-200A-B07A-ACA8-DA0E710FC2B7}"/>
               </a:ext>
             </a:extLst>
           </p:cNvPr>
@@ -617,7 +617,7 @@
           <p:cNvPr id="3" name="縦書きテキスト プレースホルダー 2">
             <a:extLst>
               <a:ext uri="{FF2B5EF4-FFF2-40B4-BE49-F238E27FC236}">
-                <a16:creationId xmlns:a16="http://schemas.microsoft.com/office/drawing/2014/main" id="{3171783D-55CC-2E41-965F-E112A3FF1505}"/>
+                <a16:creationId xmlns:a16="http://schemas.microsoft.com/office/drawing/2014/main" id="{259C04B1-46B9-F94E-CADB-00058B819F4C}"/>
               </a:ext>
             </a:extLst>
           </p:cNvPr>
@@ -711,7 +711,7 @@
           <p:cNvPr id="4" name="日付プレースホルダー 3">
             <a:extLst>
               <a:ext uri="{FF2B5EF4-FFF2-40B4-BE49-F238E27FC236}">
-                <a16:creationId xmlns:a16="http://schemas.microsoft.com/office/drawing/2014/main" id="{C479C947-90F1-20CB-E960-806750E34584}"/>
+                <a16:creationId xmlns:a16="http://schemas.microsoft.com/office/drawing/2014/main" id="{E353631A-2194-77A2-B0C3-D6F2F699937B}"/>
               </a:ext>
             </a:extLst>
           </p:cNvPr>
@@ -727,7 +727,7 @@
           <a:bodyPr/>
           <a:lstStyle/>
           <a:p>
-            <a:fld id="{A231A90A-919E-4E75-A57E-281B475D883F}" type="datetimeFigureOut">
+            <a:fld id="{09D9434B-20C4-4F04-AD68-073D04FFDACE}" type="datetimeFigureOut">
               <a:rPr kumimoji="1" lang="ja-JP" altLang="en-US" smtClean="0"/>
               <a:t>2026/7/30</a:t>
             </a:fld>
@@ -740,7 +740,7 @@
           <p:cNvPr id="5" name="フッター プレースホルダー 4">
             <a:extLst>
               <a:ext uri="{FF2B5EF4-FFF2-40B4-BE49-F238E27FC236}">
-                <a16:creationId xmlns:a16="http://schemas.microsoft.com/office/drawing/2014/main" id="{4648D5F1-9CC3-7B3C-4A5E-3C680E993515}"/>
+                <a16:creationId xmlns:a16="http://schemas.microsoft.com/office/drawing/2014/main" id="{7EE371A4-014C-DB2E-2340-5198FB75C93A}"/>
               </a:ext>
             </a:extLst>
           </p:cNvPr>
@@ -765,7 +765,7 @@
           <p:cNvPr id="6" name="スライド番号プレースホルダー 5">
             <a:extLst>
               <a:ext uri="{FF2B5EF4-FFF2-40B4-BE49-F238E27FC236}">
-                <a16:creationId xmlns:a16="http://schemas.microsoft.com/office/drawing/2014/main" id="{E844B46A-B0E2-ED0F-8CED-71588A93178B}"/>
+                <a16:creationId xmlns:a16="http://schemas.microsoft.com/office/drawing/2014/main" id="{4AE076A1-ACBC-56A4-AF46-8788090C921D}"/>
               </a:ext>
             </a:extLst>
           </p:cNvPr>
@@ -781,7 +781,7 @@
           <a:bodyPr/>
           <a:lstStyle/>
           <a:p>
-            <a:fld id="{CC7124A5-1AAF-4F4C-9983-7B0A836199C1}" type="slidenum">
+            <a:fld id="{285FFB73-0918-41E0-A07F-0F7B1C9A2F21}" type="slidenum">
               <a:rPr kumimoji="1" lang="ja-JP" altLang="en-US" smtClean="0"/>
               <a:t>‹#›</a:t>
             </a:fld>
@@ -792,7 +792,7 @@
     </p:spTree>
     <p:extLst>
       <p:ext uri="{BB962C8B-B14F-4D97-AF65-F5344CB8AC3E}">
-        <p14:creationId xmlns:p14="http://schemas.microsoft.com/office/powerpoint/2010/main" val="1259964381"/>
+        <p14:creationId xmlns:p14="http://schemas.microsoft.com/office/powerpoint/2010/main" val="2739434748"/>
       </p:ext>
     </p:extLst>
   </p:cSld>
@@ -824,7 +824,7 @@
           <p:cNvPr id="2" name="タイトル 1">
             <a:extLst>
               <a:ext uri="{FF2B5EF4-FFF2-40B4-BE49-F238E27FC236}">
-                <a16:creationId xmlns:a16="http://schemas.microsoft.com/office/drawing/2014/main" id="{606AD297-4974-6D7D-700D-D3D9EBDD02DD}"/>
+                <a16:creationId xmlns:a16="http://schemas.microsoft.com/office/drawing/2014/main" id="{9649997D-AC47-4E9C-545E-F34B956EE7FF}"/>
               </a:ext>
             </a:extLst>
           </p:cNvPr>
@@ -852,7 +852,7 @@
           <p:cNvPr id="3" name="コンテンツ プレースホルダー 2">
             <a:extLst>
               <a:ext uri="{FF2B5EF4-FFF2-40B4-BE49-F238E27FC236}">
-                <a16:creationId xmlns:a16="http://schemas.microsoft.com/office/drawing/2014/main" id="{33E28011-8D27-99BB-D5E7-BA5CEAD7D48D}"/>
+                <a16:creationId xmlns:a16="http://schemas.microsoft.com/office/drawing/2014/main" id="{E606F5AC-808D-D252-8E87-0DCD0A6024B3}"/>
               </a:ext>
             </a:extLst>
           </p:cNvPr>
@@ -941,7 +941,7 @@
           <p:cNvPr id="4" name="日付プレースホルダー 3">
             <a:extLst>
               <a:ext uri="{FF2B5EF4-FFF2-40B4-BE49-F238E27FC236}">
-                <a16:creationId xmlns:a16="http://schemas.microsoft.com/office/drawing/2014/main" id="{318D50DA-1575-322B-C004-F75C84EAA64D}"/>
+                <a16:creationId xmlns:a16="http://schemas.microsoft.com/office/drawing/2014/main" id="{1B585E70-DC4B-5961-2CBF-62437A670954}"/>
               </a:ext>
             </a:extLst>
           </p:cNvPr>
@@ -957,7 +957,7 @@
           <a:bodyPr/>
           <a:lstStyle/>
           <a:p>
-            <a:fld id="{A231A90A-919E-4E75-A57E-281B475D883F}" type="datetimeFigureOut">
+            <a:fld id="{09D9434B-20C4-4F04-AD68-073D04FFDACE}" type="datetimeFigureOut">
               <a:rPr kumimoji="1" lang="ja-JP" altLang="en-US" smtClean="0"/>
               <a:t>2026/7/30</a:t>
             </a:fld>
@@ -970,7 +970,7 @@
           <p:cNvPr id="5" name="フッター プレースホルダー 4">
             <a:extLst>
               <a:ext uri="{FF2B5EF4-FFF2-40B4-BE49-F238E27FC236}">
-                <a16:creationId xmlns:a16="http://schemas.microsoft.com/office/drawing/2014/main" id="{6E39D62C-F37D-4063-5B5C-52E89FA6C85C}"/>
+                <a16:creationId xmlns:a16="http://schemas.microsoft.com/office/drawing/2014/main" id="{A7E1DD50-3756-6CB7-2CB0-E0E331FD2DB9}"/>
               </a:ext>
             </a:extLst>
           </p:cNvPr>
@@ -995,7 +995,7 @@
           <p:cNvPr id="6" name="スライド番号プレースホルダー 5">
             <a:extLst>
               <a:ext uri="{FF2B5EF4-FFF2-40B4-BE49-F238E27FC236}">
-                <a16:creationId xmlns:a16="http://schemas.microsoft.com/office/drawing/2014/main" id="{DA441BAA-EBDF-D165-09DA-F0C7F48D3A52}"/>
+                <a16:creationId xmlns:a16="http://schemas.microsoft.com/office/drawing/2014/main" id="{48C7B66A-3CFE-B4C2-981B-DD3D6AA27F86}"/>
               </a:ext>
             </a:extLst>
           </p:cNvPr>
@@ -1011,7 +1011,7 @@
           <a:bodyPr/>
           <a:lstStyle/>
           <a:p>
-            <a:fld id="{CC7124A5-1AAF-4F4C-9983-7B0A836199C1}" type="slidenum">
+            <a:fld id="{285FFB73-0918-41E0-A07F-0F7B1C9A2F21}" type="slidenum">
               <a:rPr kumimoji="1" lang="ja-JP" altLang="en-US" smtClean="0"/>
               <a:t>‹#›</a:t>
             </a:fld>
@@ -1022,7 +1022,7 @@
     </p:spTree>
     <p:extLst>
       <p:ext uri="{BB962C8B-B14F-4D97-AF65-F5344CB8AC3E}">
-        <p14:creationId xmlns:p14="http://schemas.microsoft.com/office/powerpoint/2010/main" val="804290167"/>
+        <p14:creationId xmlns:p14="http://schemas.microsoft.com/office/powerpoint/2010/main" val="4103076211"/>
       </p:ext>
     </p:extLst>
   </p:cSld>
@@ -1054,7 +1054,7 @@
           <p:cNvPr id="2" name="タイトル 1">
             <a:extLst>
               <a:ext uri="{FF2B5EF4-FFF2-40B4-BE49-F238E27FC236}">
-                <a16:creationId xmlns:a16="http://schemas.microsoft.com/office/drawing/2014/main" id="{13AC2C33-EE7B-B9BA-CF8F-F5F8E1F864C7}"/>
+                <a16:creationId xmlns:a16="http://schemas.microsoft.com/office/drawing/2014/main" id="{E76703D1-C6B2-2934-99B1-6F8A25CC10E7}"/>
               </a:ext>
             </a:extLst>
           </p:cNvPr>
@@ -1091,7 +1091,7 @@
           <p:cNvPr id="3" name="テキスト プレースホルダー 2">
             <a:extLst>
               <a:ext uri="{FF2B5EF4-FFF2-40B4-BE49-F238E27FC236}">
-                <a16:creationId xmlns:a16="http://schemas.microsoft.com/office/drawing/2014/main" id="{12869873-3B16-369A-1987-8ABE37CE1CB3}"/>
+                <a16:creationId xmlns:a16="http://schemas.microsoft.com/office/drawing/2014/main" id="{FEA5B152-9C0B-56DF-E2E0-C0F3CEC4F6F0}"/>
               </a:ext>
             </a:extLst>
           </p:cNvPr>
@@ -1216,7 +1216,7 @@
           <p:cNvPr id="4" name="日付プレースホルダー 3">
             <a:extLst>
               <a:ext uri="{FF2B5EF4-FFF2-40B4-BE49-F238E27FC236}">
-                <a16:creationId xmlns:a16="http://schemas.microsoft.com/office/drawing/2014/main" id="{12D16963-9731-5385-55C7-DF27B2495713}"/>
+                <a16:creationId xmlns:a16="http://schemas.microsoft.com/office/drawing/2014/main" id="{7F718200-8FBD-4CA1-B1DD-F478FE018914}"/>
               </a:ext>
             </a:extLst>
           </p:cNvPr>
@@ -1232,7 +1232,7 @@
           <a:bodyPr/>
           <a:lstStyle/>
           <a:p>
-            <a:fld id="{A231A90A-919E-4E75-A57E-281B475D883F}" type="datetimeFigureOut">
+            <a:fld id="{09D9434B-20C4-4F04-AD68-073D04FFDACE}" type="datetimeFigureOut">
               <a:rPr kumimoji="1" lang="ja-JP" altLang="en-US" smtClean="0"/>
               <a:t>2026/7/30</a:t>
             </a:fld>
@@ -1245,7 +1245,7 @@
           <p:cNvPr id="5" name="フッター プレースホルダー 4">
             <a:extLst>
               <a:ext uri="{FF2B5EF4-FFF2-40B4-BE49-F238E27FC236}">
-                <a16:creationId xmlns:a16="http://schemas.microsoft.com/office/drawing/2014/main" id="{7B8961D3-61E1-4837-A2FD-0E40A1E5FD03}"/>
+                <a16:creationId xmlns:a16="http://schemas.microsoft.com/office/drawing/2014/main" id="{D408B549-E68C-43E4-A818-E88BFE1DD6F0}"/>
               </a:ext>
             </a:extLst>
           </p:cNvPr>
@@ -1270,7 +1270,7 @@
           <p:cNvPr id="6" name="スライド番号プレースホルダー 5">
             <a:extLst>
               <a:ext uri="{FF2B5EF4-FFF2-40B4-BE49-F238E27FC236}">
-                <a16:creationId xmlns:a16="http://schemas.microsoft.com/office/drawing/2014/main" id="{6C81C509-CA4B-BEB7-F6A4-C73AABCF0A2D}"/>
+                <a16:creationId xmlns:a16="http://schemas.microsoft.com/office/drawing/2014/main" id="{6A2F3CC4-39FF-37E8-F369-ED4E61BC83B4}"/>
               </a:ext>
             </a:extLst>
           </p:cNvPr>
@@ -1286,7 +1286,7 @@
           <a:bodyPr/>
           <a:lstStyle/>
           <a:p>
-            <a:fld id="{CC7124A5-1AAF-4F4C-9983-7B0A836199C1}" type="slidenum">
+            <a:fld id="{285FFB73-0918-41E0-A07F-0F7B1C9A2F21}" type="slidenum">
               <a:rPr kumimoji="1" lang="ja-JP" altLang="en-US" smtClean="0"/>
               <a:t>‹#›</a:t>
             </a:fld>
@@ -1297,7 +1297,7 @@
     </p:spTree>
     <p:extLst>
       <p:ext uri="{BB962C8B-B14F-4D97-AF65-F5344CB8AC3E}">
-        <p14:creationId xmlns:p14="http://schemas.microsoft.com/office/powerpoint/2010/main" val="4274295698"/>
+        <p14:creationId xmlns:p14="http://schemas.microsoft.com/office/powerpoint/2010/main" val="358859808"/>
       </p:ext>
     </p:extLst>
   </p:cSld>
@@ -1329,7 +1329,7 @@
           <p:cNvPr id="2" name="タイトル 1">
             <a:extLst>
               <a:ext uri="{FF2B5EF4-FFF2-40B4-BE49-F238E27FC236}">
-                <a16:creationId xmlns:a16="http://schemas.microsoft.com/office/drawing/2014/main" id="{3743C83C-9B12-08D3-A8DF-D685C709F053}"/>
+                <a16:creationId xmlns:a16="http://schemas.microsoft.com/office/drawing/2014/main" id="{DAA4338D-0F95-11B2-2ADF-3DCD1CBA2098}"/>
               </a:ext>
             </a:extLst>
           </p:cNvPr>
@@ -1357,7 +1357,7 @@
           <p:cNvPr id="3" name="コンテンツ プレースホルダー 2">
             <a:extLst>
               <a:ext uri="{FF2B5EF4-FFF2-40B4-BE49-F238E27FC236}">
-                <a16:creationId xmlns:a16="http://schemas.microsoft.com/office/drawing/2014/main" id="{9F116AC9-61F7-53E9-670B-0C3925705064}"/>
+                <a16:creationId xmlns:a16="http://schemas.microsoft.com/office/drawing/2014/main" id="{EBF38891-837B-856E-C3D8-A70F5D113E7A}"/>
               </a:ext>
             </a:extLst>
           </p:cNvPr>
@@ -1451,7 +1451,7 @@
           <p:cNvPr id="4" name="コンテンツ プレースホルダー 3">
             <a:extLst>
               <a:ext uri="{FF2B5EF4-FFF2-40B4-BE49-F238E27FC236}">
-                <a16:creationId xmlns:a16="http://schemas.microsoft.com/office/drawing/2014/main" id="{08B33C33-FAD3-FF6B-3D88-4092DE0EC103}"/>
+                <a16:creationId xmlns:a16="http://schemas.microsoft.com/office/drawing/2014/main" id="{31513D73-8B6B-0AE8-0344-B722917E5E5B}"/>
               </a:ext>
             </a:extLst>
           </p:cNvPr>
@@ -1545,7 +1545,7 @@
           <p:cNvPr id="5" name="日付プレースホルダー 4">
             <a:extLst>
               <a:ext uri="{FF2B5EF4-FFF2-40B4-BE49-F238E27FC236}">
-                <a16:creationId xmlns:a16="http://schemas.microsoft.com/office/drawing/2014/main" id="{DBDCF6EE-16D6-F4D5-5A90-6A1FCFA0C3C0}"/>
+                <a16:creationId xmlns:a16="http://schemas.microsoft.com/office/drawing/2014/main" id="{08C4F93E-603D-67E2-AB6F-A6FFB6D63ADE}"/>
               </a:ext>
             </a:extLst>
           </p:cNvPr>
@@ -1561,7 +1561,7 @@
           <a:bodyPr/>
           <a:lstStyle/>
           <a:p>
-            <a:fld id="{A231A90A-919E-4E75-A57E-281B475D883F}" type="datetimeFigureOut">
+            <a:fld id="{09D9434B-20C4-4F04-AD68-073D04FFDACE}" type="datetimeFigureOut">
               <a:rPr kumimoji="1" lang="ja-JP" altLang="en-US" smtClean="0"/>
               <a:t>2026/7/30</a:t>
             </a:fld>
@@ -1574,7 +1574,7 @@
           <p:cNvPr id="6" name="フッター プレースホルダー 5">
             <a:extLst>
               <a:ext uri="{FF2B5EF4-FFF2-40B4-BE49-F238E27FC236}">
-                <a16:creationId xmlns:a16="http://schemas.microsoft.com/office/drawing/2014/main" id="{858D939E-2FF4-CE06-618B-DB666ACCDDB5}"/>
+                <a16:creationId xmlns:a16="http://schemas.microsoft.com/office/drawing/2014/main" id="{6340CB39-BC98-82F0-57EC-53CBC1401313}"/>
               </a:ext>
             </a:extLst>
           </p:cNvPr>
@@ -1599,7 +1599,7 @@
           <p:cNvPr id="7" name="スライド番号プレースホルダー 6">
             <a:extLst>
               <a:ext uri="{FF2B5EF4-FFF2-40B4-BE49-F238E27FC236}">
-                <a16:creationId xmlns:a16="http://schemas.microsoft.com/office/drawing/2014/main" id="{7980D9F4-D0BB-DFB1-E9F8-A686CDDDF816}"/>
+                <a16:creationId xmlns:a16="http://schemas.microsoft.com/office/drawing/2014/main" id="{24B0B74E-F1B5-73A8-62EF-366A3C2ADD7D}"/>
               </a:ext>
             </a:extLst>
           </p:cNvPr>
@@ -1615,7 +1615,7 @@
           <a:bodyPr/>
           <a:lstStyle/>
           <a:p>
-            <a:fld id="{CC7124A5-1AAF-4F4C-9983-7B0A836199C1}" type="slidenum">
+            <a:fld id="{285FFB73-0918-41E0-A07F-0F7B1C9A2F21}" type="slidenum">
               <a:rPr kumimoji="1" lang="ja-JP" altLang="en-US" smtClean="0"/>
               <a:t>‹#›</a:t>
             </a:fld>
@@ -1626,7 +1626,7 @@
     </p:spTree>
     <p:extLst>
       <p:ext uri="{BB962C8B-B14F-4D97-AF65-F5344CB8AC3E}">
-        <p14:creationId xmlns:p14="http://schemas.microsoft.com/office/powerpoint/2010/main" val="2846535134"/>
+        <p14:creationId xmlns:p14="http://schemas.microsoft.com/office/powerpoint/2010/main" val="542056195"/>
       </p:ext>
     </p:extLst>
   </p:cSld>
@@ -1658,7 +1658,7 @@
           <p:cNvPr id="2" name="タイトル 1">
             <a:extLst>
               <a:ext uri="{FF2B5EF4-FFF2-40B4-BE49-F238E27FC236}">
-                <a16:creationId xmlns:a16="http://schemas.microsoft.com/office/drawing/2014/main" id="{C7AFC89A-9419-9F1A-F7F6-FAB26447054C}"/>
+                <a16:creationId xmlns:a16="http://schemas.microsoft.com/office/drawing/2014/main" id="{291F1464-3CD3-93D0-7A80-85D8C634CA53}"/>
               </a:ext>
             </a:extLst>
           </p:cNvPr>
@@ -1691,7 +1691,7 @@
           <p:cNvPr id="3" name="テキスト プレースホルダー 2">
             <a:extLst>
               <a:ext uri="{FF2B5EF4-FFF2-40B4-BE49-F238E27FC236}">
-                <a16:creationId xmlns:a16="http://schemas.microsoft.com/office/drawing/2014/main" id="{AE050D2A-E8D8-2081-D637-3E7758E397FB}"/>
+                <a16:creationId xmlns:a16="http://schemas.microsoft.com/office/drawing/2014/main" id="{2DC1FC64-B6DA-D616-AC78-A458035730DE}"/>
               </a:ext>
             </a:extLst>
           </p:cNvPr>
@@ -1762,7 +1762,7 @@
           <p:cNvPr id="4" name="コンテンツ プレースホルダー 3">
             <a:extLst>
               <a:ext uri="{FF2B5EF4-FFF2-40B4-BE49-F238E27FC236}">
-                <a16:creationId xmlns:a16="http://schemas.microsoft.com/office/drawing/2014/main" id="{42BD32EC-F4FF-E958-4526-E5894699E5EE}"/>
+                <a16:creationId xmlns:a16="http://schemas.microsoft.com/office/drawing/2014/main" id="{C1D17BC8-6273-F8E4-BD2A-513C0212531D}"/>
               </a:ext>
             </a:extLst>
           </p:cNvPr>
@@ -1856,7 +1856,7 @@
           <p:cNvPr id="5" name="テキスト プレースホルダー 4">
             <a:extLst>
               <a:ext uri="{FF2B5EF4-FFF2-40B4-BE49-F238E27FC236}">
-                <a16:creationId xmlns:a16="http://schemas.microsoft.com/office/drawing/2014/main" id="{852DE3EF-FFE7-C121-FD46-7EFD15C80820}"/>
+                <a16:creationId xmlns:a16="http://schemas.microsoft.com/office/drawing/2014/main" id="{C35716F7-76A5-E139-D98B-F8D9287DAD5E}"/>
               </a:ext>
             </a:extLst>
           </p:cNvPr>
@@ -1927,7 +1927,7 @@
           <p:cNvPr id="6" name="コンテンツ プレースホルダー 5">
             <a:extLst>
               <a:ext uri="{FF2B5EF4-FFF2-40B4-BE49-F238E27FC236}">
-                <a16:creationId xmlns:a16="http://schemas.microsoft.com/office/drawing/2014/main" id="{A405153A-1B75-AF60-80F2-A7247F195FB0}"/>
+                <a16:creationId xmlns:a16="http://schemas.microsoft.com/office/drawing/2014/main" id="{90B35CE1-840B-C020-DED3-A08135BD24DF}"/>
               </a:ext>
             </a:extLst>
           </p:cNvPr>
@@ -2021,7 +2021,7 @@
           <p:cNvPr id="7" name="日付プレースホルダー 6">
             <a:extLst>
               <a:ext uri="{FF2B5EF4-FFF2-40B4-BE49-F238E27FC236}">
-                <a16:creationId xmlns:a16="http://schemas.microsoft.com/office/drawing/2014/main" id="{C45FB775-8FCD-35E4-5AB2-AF102838C67E}"/>
+                <a16:creationId xmlns:a16="http://schemas.microsoft.com/office/drawing/2014/main" id="{8C6CD0BD-5FA4-28AF-FD51-634CA34D3E07}"/>
               </a:ext>
             </a:extLst>
           </p:cNvPr>
@@ -2037,7 +2037,7 @@
           <a:bodyPr/>
           <a:lstStyle/>
           <a:p>
-            <a:fld id="{A231A90A-919E-4E75-A57E-281B475D883F}" type="datetimeFigureOut">
+            <a:fld id="{09D9434B-20C4-4F04-AD68-073D04FFDACE}" type="datetimeFigureOut">
               <a:rPr kumimoji="1" lang="ja-JP" altLang="en-US" smtClean="0"/>
               <a:t>2026/7/30</a:t>
             </a:fld>
@@ -2050,7 +2050,7 @@
           <p:cNvPr id="8" name="フッター プレースホルダー 7">
             <a:extLst>
               <a:ext uri="{FF2B5EF4-FFF2-40B4-BE49-F238E27FC236}">
-                <a16:creationId xmlns:a16="http://schemas.microsoft.com/office/drawing/2014/main" id="{E6F142A4-1C23-F239-8B97-80BFF15E4691}"/>
+                <a16:creationId xmlns:a16="http://schemas.microsoft.com/office/drawing/2014/main" id="{73DF7834-1977-BAEB-BF63-717DDA46343B}"/>
               </a:ext>
             </a:extLst>
           </p:cNvPr>
@@ -2075,7 +2075,7 @@
           <p:cNvPr id="9" name="スライド番号プレースホルダー 8">
             <a:extLst>
               <a:ext uri="{FF2B5EF4-FFF2-40B4-BE49-F238E27FC236}">
-                <a16:creationId xmlns:a16="http://schemas.microsoft.com/office/drawing/2014/main" id="{67E6FC67-543A-A459-F728-FA5B535B1687}"/>
+                <a16:creationId xmlns:a16="http://schemas.microsoft.com/office/drawing/2014/main" id="{4CA46FE2-4508-9389-D153-CC1757BD45FC}"/>
               </a:ext>
             </a:extLst>
           </p:cNvPr>
@@ -2091,7 +2091,7 @@
           <a:bodyPr/>
           <a:lstStyle/>
           <a:p>
-            <a:fld id="{CC7124A5-1AAF-4F4C-9983-7B0A836199C1}" type="slidenum">
+            <a:fld id="{285FFB73-0918-41E0-A07F-0F7B1C9A2F21}" type="slidenum">
               <a:rPr kumimoji="1" lang="ja-JP" altLang="en-US" smtClean="0"/>
               <a:t>‹#›</a:t>
             </a:fld>
@@ -2102,7 +2102,7 @@
     </p:spTree>
     <p:extLst>
       <p:ext uri="{BB962C8B-B14F-4D97-AF65-F5344CB8AC3E}">
-        <p14:creationId xmlns:p14="http://schemas.microsoft.com/office/powerpoint/2010/main" val="108472044"/>
+        <p14:creationId xmlns:p14="http://schemas.microsoft.com/office/powerpoint/2010/main" val="563264052"/>
       </p:ext>
     </p:extLst>
   </p:cSld>
@@ -2134,7 +2134,7 @@
           <p:cNvPr id="2" name="タイトル 1">
             <a:extLst>
               <a:ext uri="{FF2B5EF4-FFF2-40B4-BE49-F238E27FC236}">
-                <a16:creationId xmlns:a16="http://schemas.microsoft.com/office/drawing/2014/main" id="{096569C1-E2CA-047C-C2DC-329316DBC128}"/>
+                <a16:creationId xmlns:a16="http://schemas.microsoft.com/office/drawing/2014/main" id="{748D2284-D429-45CC-6039-7C3A023A22A3}"/>
               </a:ext>
             </a:extLst>
           </p:cNvPr>
@@ -2162,7 +2162,7 @@
           <p:cNvPr id="3" name="日付プレースホルダー 2">
             <a:extLst>
               <a:ext uri="{FF2B5EF4-FFF2-40B4-BE49-F238E27FC236}">
-                <a16:creationId xmlns:a16="http://schemas.microsoft.com/office/drawing/2014/main" id="{2661D363-CEE1-00A9-AFA6-55581BC9F616}"/>
+                <a16:creationId xmlns:a16="http://schemas.microsoft.com/office/drawing/2014/main" id="{403A55C8-6614-0DC2-542E-C021FBCFEE12}"/>
               </a:ext>
             </a:extLst>
           </p:cNvPr>
@@ -2178,7 +2178,7 @@
           <a:bodyPr/>
           <a:lstStyle/>
           <a:p>
-            <a:fld id="{A231A90A-919E-4E75-A57E-281B475D883F}" type="datetimeFigureOut">
+            <a:fld id="{09D9434B-20C4-4F04-AD68-073D04FFDACE}" type="datetimeFigureOut">
               <a:rPr kumimoji="1" lang="ja-JP" altLang="en-US" smtClean="0"/>
               <a:t>2026/7/30</a:t>
             </a:fld>
@@ -2191,7 +2191,7 @@
           <p:cNvPr id="4" name="フッター プレースホルダー 3">
             <a:extLst>
               <a:ext uri="{FF2B5EF4-FFF2-40B4-BE49-F238E27FC236}">
-                <a16:creationId xmlns:a16="http://schemas.microsoft.com/office/drawing/2014/main" id="{E4DCC932-13B1-EC15-6F2B-F493CEB9EE91}"/>
+                <a16:creationId xmlns:a16="http://schemas.microsoft.com/office/drawing/2014/main" id="{67866263-266D-300C-955E-73D03841B442}"/>
               </a:ext>
             </a:extLst>
           </p:cNvPr>
@@ -2216,7 +2216,7 @@
           <p:cNvPr id="5" name="スライド番号プレースホルダー 4">
             <a:extLst>
               <a:ext uri="{FF2B5EF4-FFF2-40B4-BE49-F238E27FC236}">
-                <a16:creationId xmlns:a16="http://schemas.microsoft.com/office/drawing/2014/main" id="{B828FEB3-D126-E682-45D3-6115640607B9}"/>
+                <a16:creationId xmlns:a16="http://schemas.microsoft.com/office/drawing/2014/main" id="{345CA4BA-BE3D-6C4B-9675-DB913B77FF44}"/>
               </a:ext>
             </a:extLst>
           </p:cNvPr>
@@ -2232,7 +2232,7 @@
           <a:bodyPr/>
           <a:lstStyle/>
           <a:p>
-            <a:fld id="{CC7124A5-1AAF-4F4C-9983-7B0A836199C1}" type="slidenum">
+            <a:fld id="{285FFB73-0918-41E0-A07F-0F7B1C9A2F21}" type="slidenum">
               <a:rPr kumimoji="1" lang="ja-JP" altLang="en-US" smtClean="0"/>
               <a:t>‹#›</a:t>
             </a:fld>
@@ -2243,7 +2243,7 @@
     </p:spTree>
     <p:extLst>
       <p:ext uri="{BB962C8B-B14F-4D97-AF65-F5344CB8AC3E}">
-        <p14:creationId xmlns:p14="http://schemas.microsoft.com/office/powerpoint/2010/main" val="1588707050"/>
+        <p14:creationId xmlns:p14="http://schemas.microsoft.com/office/powerpoint/2010/main" val="2585897386"/>
       </p:ext>
     </p:extLst>
   </p:cSld>
@@ -2275,7 +2275,7 @@
           <p:cNvPr id="2" name="日付プレースホルダー 1">
             <a:extLst>
               <a:ext uri="{FF2B5EF4-FFF2-40B4-BE49-F238E27FC236}">
-                <a16:creationId xmlns:a16="http://schemas.microsoft.com/office/drawing/2014/main" id="{584C4BFC-C2B0-0AF0-EA0A-14FD5F837A88}"/>
+                <a16:creationId xmlns:a16="http://schemas.microsoft.com/office/drawing/2014/main" id="{941F605C-393E-A432-7F84-DA1F04CB7CCF}"/>
               </a:ext>
             </a:extLst>
           </p:cNvPr>
@@ -2291,7 +2291,7 @@
           <a:bodyPr/>
           <a:lstStyle/>
           <a:p>
-            <a:fld id="{A231A90A-919E-4E75-A57E-281B475D883F}" type="datetimeFigureOut">
+            <a:fld id="{09D9434B-20C4-4F04-AD68-073D04FFDACE}" type="datetimeFigureOut">
               <a:rPr kumimoji="1" lang="ja-JP" altLang="en-US" smtClean="0"/>
               <a:t>2026/7/30</a:t>
             </a:fld>
@@ -2304,7 +2304,7 @@
           <p:cNvPr id="3" name="フッター プレースホルダー 2">
             <a:extLst>
               <a:ext uri="{FF2B5EF4-FFF2-40B4-BE49-F238E27FC236}">
-                <a16:creationId xmlns:a16="http://schemas.microsoft.com/office/drawing/2014/main" id="{74D5F6E4-650E-E1B3-2E21-B7B18B05E597}"/>
+                <a16:creationId xmlns:a16="http://schemas.microsoft.com/office/drawing/2014/main" id="{DAF5BC58-6DE2-8B46-2B88-8C98B9A9084B}"/>
               </a:ext>
             </a:extLst>
           </p:cNvPr>
@@ -2329,7 +2329,7 @@
           <p:cNvPr id="4" name="スライド番号プレースホルダー 3">
             <a:extLst>
               <a:ext uri="{FF2B5EF4-FFF2-40B4-BE49-F238E27FC236}">
-                <a16:creationId xmlns:a16="http://schemas.microsoft.com/office/drawing/2014/main" id="{F2ECB23F-B9EF-6361-48F1-CD322E538034}"/>
+                <a16:creationId xmlns:a16="http://schemas.microsoft.com/office/drawing/2014/main" id="{7A02C69B-9D51-42ED-8216-6BB6124311E3}"/>
               </a:ext>
             </a:extLst>
           </p:cNvPr>
@@ -2345,7 +2345,7 @@
           <a:bodyPr/>
           <a:lstStyle/>
           <a:p>
-            <a:fld id="{CC7124A5-1AAF-4F4C-9983-7B0A836199C1}" type="slidenum">
+            <a:fld id="{285FFB73-0918-41E0-A07F-0F7B1C9A2F21}" type="slidenum">
               <a:rPr kumimoji="1" lang="ja-JP" altLang="en-US" smtClean="0"/>
               <a:t>‹#›</a:t>
             </a:fld>
@@ -2356,7 +2356,7 @@
     </p:spTree>
     <p:extLst>
       <p:ext uri="{BB962C8B-B14F-4D97-AF65-F5344CB8AC3E}">
-        <p14:creationId xmlns:p14="http://schemas.microsoft.com/office/powerpoint/2010/main" val="2914302872"/>
+        <p14:creationId xmlns:p14="http://schemas.microsoft.com/office/powerpoint/2010/main" val="1694941106"/>
       </p:ext>
     </p:extLst>
   </p:cSld>
@@ -2388,7 +2388,7 @@
           <p:cNvPr id="2" name="タイトル 1">
             <a:extLst>
               <a:ext uri="{FF2B5EF4-FFF2-40B4-BE49-F238E27FC236}">
-                <a16:creationId xmlns:a16="http://schemas.microsoft.com/office/drawing/2014/main" id="{EEE71627-628E-0BA2-0259-251516D2B94A}"/>
+                <a16:creationId xmlns:a16="http://schemas.microsoft.com/office/drawing/2014/main" id="{071095ED-ED9B-BF4A-30B1-71A4625F50D4}"/>
               </a:ext>
             </a:extLst>
           </p:cNvPr>
@@ -2425,7 +2425,7 @@
           <p:cNvPr id="3" name="コンテンツ プレースホルダー 2">
             <a:extLst>
               <a:ext uri="{FF2B5EF4-FFF2-40B4-BE49-F238E27FC236}">
-                <a16:creationId xmlns:a16="http://schemas.microsoft.com/office/drawing/2014/main" id="{BFBE9629-591E-EE84-55F4-A4411BFC97E1}"/>
+                <a16:creationId xmlns:a16="http://schemas.microsoft.com/office/drawing/2014/main" id="{9A837EF4-B8D4-A529-1FD0-A3A18C69AEBE}"/>
               </a:ext>
             </a:extLst>
           </p:cNvPr>
@@ -2547,7 +2547,7 @@
           <p:cNvPr id="4" name="テキスト プレースホルダー 3">
             <a:extLst>
               <a:ext uri="{FF2B5EF4-FFF2-40B4-BE49-F238E27FC236}">
-                <a16:creationId xmlns:a16="http://schemas.microsoft.com/office/drawing/2014/main" id="{9CA06A4D-4CDE-3803-4789-649804C7AB71}"/>
+                <a16:creationId xmlns:a16="http://schemas.microsoft.com/office/drawing/2014/main" id="{4A96FF37-6A50-0266-BA8A-43A6335E4BD0}"/>
               </a:ext>
             </a:extLst>
           </p:cNvPr>
@@ -2618,7 +2618,7 @@
           <p:cNvPr id="5" name="日付プレースホルダー 4">
             <a:extLst>
               <a:ext uri="{FF2B5EF4-FFF2-40B4-BE49-F238E27FC236}">
-                <a16:creationId xmlns:a16="http://schemas.microsoft.com/office/drawing/2014/main" id="{28858241-CCC2-74AF-8B88-C4A15D31A78A}"/>
+                <a16:creationId xmlns:a16="http://schemas.microsoft.com/office/drawing/2014/main" id="{096193DC-F1B7-DC43-6228-B1AA275CC4F0}"/>
               </a:ext>
             </a:extLst>
           </p:cNvPr>
@@ -2634,7 +2634,7 @@
           <a:bodyPr/>
           <a:lstStyle/>
           <a:p>
-            <a:fld id="{A231A90A-919E-4E75-A57E-281B475D883F}" type="datetimeFigureOut">
+            <a:fld id="{09D9434B-20C4-4F04-AD68-073D04FFDACE}" type="datetimeFigureOut">
               <a:rPr kumimoji="1" lang="ja-JP" altLang="en-US" smtClean="0"/>
               <a:t>2026/7/30</a:t>
             </a:fld>
@@ -2647,7 +2647,7 @@
           <p:cNvPr id="6" name="フッター プレースホルダー 5">
             <a:extLst>
               <a:ext uri="{FF2B5EF4-FFF2-40B4-BE49-F238E27FC236}">
-                <a16:creationId xmlns:a16="http://schemas.microsoft.com/office/drawing/2014/main" id="{CEBFB69E-E7A1-6E86-9075-1D522DBCE25A}"/>
+                <a16:creationId xmlns:a16="http://schemas.microsoft.com/office/drawing/2014/main" id="{A6715FDD-4F0B-610B-749F-B0B53164F169}"/>
               </a:ext>
             </a:extLst>
           </p:cNvPr>
@@ -2672,7 +2672,7 @@
           <p:cNvPr id="7" name="スライド番号プレースホルダー 6">
             <a:extLst>
               <a:ext uri="{FF2B5EF4-FFF2-40B4-BE49-F238E27FC236}">
-                <a16:creationId xmlns:a16="http://schemas.microsoft.com/office/drawing/2014/main" id="{919868D4-F1DC-9544-42F9-78C12098A7E8}"/>
+                <a16:creationId xmlns:a16="http://schemas.microsoft.com/office/drawing/2014/main" id="{903076CD-ABEE-C6CD-8B80-3364E82BB3F1}"/>
               </a:ext>
             </a:extLst>
           </p:cNvPr>
@@ -2688,7 +2688,7 @@
           <a:bodyPr/>
           <a:lstStyle/>
           <a:p>
-            <a:fld id="{CC7124A5-1AAF-4F4C-9983-7B0A836199C1}" type="slidenum">
+            <a:fld id="{285FFB73-0918-41E0-A07F-0F7B1C9A2F21}" type="slidenum">
               <a:rPr kumimoji="1" lang="ja-JP" altLang="en-US" smtClean="0"/>
               <a:t>‹#›</a:t>
             </a:fld>
@@ -2699,7 +2699,7 @@
     </p:spTree>
     <p:extLst>
       <p:ext uri="{BB962C8B-B14F-4D97-AF65-F5344CB8AC3E}">
-        <p14:creationId xmlns:p14="http://schemas.microsoft.com/office/powerpoint/2010/main" val="1422012828"/>
+        <p14:creationId xmlns:p14="http://schemas.microsoft.com/office/powerpoint/2010/main" val="1373764055"/>
       </p:ext>
     </p:extLst>
   </p:cSld>
@@ -2731,7 +2731,7 @@
           <p:cNvPr id="2" name="タイトル 1">
             <a:extLst>
               <a:ext uri="{FF2B5EF4-FFF2-40B4-BE49-F238E27FC236}">
-                <a16:creationId xmlns:a16="http://schemas.microsoft.com/office/drawing/2014/main" id="{0EABB143-2781-418D-CD6D-890D7E143661}"/>
+                <a16:creationId xmlns:a16="http://schemas.microsoft.com/office/drawing/2014/main" id="{E22ACB39-A721-FF12-0614-CD8178364558}"/>
               </a:ext>
             </a:extLst>
           </p:cNvPr>
@@ -2768,7 +2768,7 @@
           <p:cNvPr id="3" name="図プレースホルダー 2">
             <a:extLst>
               <a:ext uri="{FF2B5EF4-FFF2-40B4-BE49-F238E27FC236}">
-                <a16:creationId xmlns:a16="http://schemas.microsoft.com/office/drawing/2014/main" id="{70E38637-E165-4F09-95C2-055889CB5AC1}"/>
+                <a16:creationId xmlns:a16="http://schemas.microsoft.com/office/drawing/2014/main" id="{D647323F-454B-60F5-B80E-186AD5156F56}"/>
               </a:ext>
             </a:extLst>
           </p:cNvPr>
@@ -2835,7 +2835,7 @@
           <p:cNvPr id="4" name="テキスト プレースホルダー 3">
             <a:extLst>
               <a:ext uri="{FF2B5EF4-FFF2-40B4-BE49-F238E27FC236}">
-                <a16:creationId xmlns:a16="http://schemas.microsoft.com/office/drawing/2014/main" id="{F17DAAC0-C275-1319-AB60-45B8862A38EE}"/>
+                <a16:creationId xmlns:a16="http://schemas.microsoft.com/office/drawing/2014/main" id="{97411E3C-E48E-DF2A-6F1B-6E63508F2656}"/>
               </a:ext>
             </a:extLst>
           </p:cNvPr>
@@ -2906,7 +2906,7 @@
           <p:cNvPr id="5" name="日付プレースホルダー 4">
             <a:extLst>
               <a:ext uri="{FF2B5EF4-FFF2-40B4-BE49-F238E27FC236}">
-                <a16:creationId xmlns:a16="http://schemas.microsoft.com/office/drawing/2014/main" id="{64D27C72-238F-918E-B702-8414D04A7647}"/>
+                <a16:creationId xmlns:a16="http://schemas.microsoft.com/office/drawing/2014/main" id="{28C8B627-FA67-925A-CA82-255AC33BD368}"/>
               </a:ext>
             </a:extLst>
           </p:cNvPr>
@@ -2922,7 +2922,7 @@
           <a:bodyPr/>
           <a:lstStyle/>
           <a:p>
-            <a:fld id="{A231A90A-919E-4E75-A57E-281B475D883F}" type="datetimeFigureOut">
+            <a:fld id="{09D9434B-20C4-4F04-AD68-073D04FFDACE}" type="datetimeFigureOut">
               <a:rPr kumimoji="1" lang="ja-JP" altLang="en-US" smtClean="0"/>
               <a:t>2026/7/30</a:t>
             </a:fld>
@@ -2935,7 +2935,7 @@
           <p:cNvPr id="6" name="フッター プレースホルダー 5">
             <a:extLst>
               <a:ext uri="{FF2B5EF4-FFF2-40B4-BE49-F238E27FC236}">
-                <a16:creationId xmlns:a16="http://schemas.microsoft.com/office/drawing/2014/main" id="{3532CF7D-8095-F55D-9E22-15E076947F4A}"/>
+                <a16:creationId xmlns:a16="http://schemas.microsoft.com/office/drawing/2014/main" id="{4FE3CD19-05B0-F9EA-132D-DD7B2A9B2F42}"/>
               </a:ext>
             </a:extLst>
           </p:cNvPr>
@@ -2960,7 +2960,7 @@
           <p:cNvPr id="7" name="スライド番号プレースホルダー 6">
             <a:extLst>
               <a:ext uri="{FF2B5EF4-FFF2-40B4-BE49-F238E27FC236}">
-                <a16:creationId xmlns:a16="http://schemas.microsoft.com/office/drawing/2014/main" id="{FB2AF02B-14C2-0B8D-9527-25F54E76352D}"/>
+                <a16:creationId xmlns:a16="http://schemas.microsoft.com/office/drawing/2014/main" id="{28AC0C91-EB5D-E0B5-244A-E706ECE68EF6}"/>
               </a:ext>
             </a:extLst>
           </p:cNvPr>
@@ -2976,7 +2976,7 @@
           <a:bodyPr/>
           <a:lstStyle/>
           <a:p>
-            <a:fld id="{CC7124A5-1AAF-4F4C-9983-7B0A836199C1}" type="slidenum">
+            <a:fld id="{285FFB73-0918-41E0-A07F-0F7B1C9A2F21}" type="slidenum">
               <a:rPr kumimoji="1" lang="ja-JP" altLang="en-US" smtClean="0"/>
               <a:t>‹#›</a:t>
             </a:fld>
@@ -2987,7 +2987,7 @@
     </p:spTree>
     <p:extLst>
       <p:ext uri="{BB962C8B-B14F-4D97-AF65-F5344CB8AC3E}">
-        <p14:creationId xmlns:p14="http://schemas.microsoft.com/office/powerpoint/2010/main" val="492415523"/>
+        <p14:creationId xmlns:p14="http://schemas.microsoft.com/office/powerpoint/2010/main" val="3646522948"/>
       </p:ext>
     </p:extLst>
   </p:cSld>
@@ -3024,7 +3024,7 @@
           <p:cNvPr id="2" name="タイトル プレースホルダー 1">
             <a:extLst>
               <a:ext uri="{FF2B5EF4-FFF2-40B4-BE49-F238E27FC236}">
-                <a16:creationId xmlns:a16="http://schemas.microsoft.com/office/drawing/2014/main" id="{78003093-ED9C-E884-6402-0CAA72B32BB0}"/>
+                <a16:creationId xmlns:a16="http://schemas.microsoft.com/office/drawing/2014/main" id="{1B848833-08EF-CFE2-6143-1BF0E7F84E01}"/>
               </a:ext>
             </a:extLst>
           </p:cNvPr>
@@ -3062,7 +3062,7 @@
           <p:cNvPr id="3" name="テキスト プレースホルダー 2">
             <a:extLst>
               <a:ext uri="{FF2B5EF4-FFF2-40B4-BE49-F238E27FC236}">
-                <a16:creationId xmlns:a16="http://schemas.microsoft.com/office/drawing/2014/main" id="{EEFB8EE3-D644-A8B9-E931-21D5257D2DC0}"/>
+                <a16:creationId xmlns:a16="http://schemas.microsoft.com/office/drawing/2014/main" id="{ABAF77BD-9E1A-AFC5-F6AD-F55D77508301}"/>
               </a:ext>
             </a:extLst>
           </p:cNvPr>
@@ -3161,7 +3161,7 @@
           <p:cNvPr id="4" name="日付プレースホルダー 3">
             <a:extLst>
               <a:ext uri="{FF2B5EF4-FFF2-40B4-BE49-F238E27FC236}">
-                <a16:creationId xmlns:a16="http://schemas.microsoft.com/office/drawing/2014/main" id="{F757B01F-D65A-281A-A1BA-E989DFCF9FDE}"/>
+                <a16:creationId xmlns:a16="http://schemas.microsoft.com/office/drawing/2014/main" id="{FA092FFC-62A0-49B4-372F-5444C983997D}"/>
               </a:ext>
             </a:extLst>
           </p:cNvPr>
@@ -3195,7 +3195,7 @@
             </a:lvl1pPr>
           </a:lstStyle>
           <a:p>
-            <a:fld id="{A231A90A-919E-4E75-A57E-281B475D883F}" type="datetimeFigureOut">
+            <a:fld id="{09D9434B-20C4-4F04-AD68-073D04FFDACE}" type="datetimeFigureOut">
               <a:rPr kumimoji="1" lang="ja-JP" altLang="en-US" smtClean="0"/>
               <a:t>2026/7/30</a:t>
             </a:fld>
@@ -3208,7 +3208,7 @@
           <p:cNvPr id="5" name="フッター プレースホルダー 4">
             <a:extLst>
               <a:ext uri="{FF2B5EF4-FFF2-40B4-BE49-F238E27FC236}">
-                <a16:creationId xmlns:a16="http://schemas.microsoft.com/office/drawing/2014/main" id="{52C3E278-1B9B-9991-4928-35AA896EAB02}"/>
+                <a16:creationId xmlns:a16="http://schemas.microsoft.com/office/drawing/2014/main" id="{2E5048D4-F88F-4073-3CE4-9E19186C5CB1}"/>
               </a:ext>
             </a:extLst>
           </p:cNvPr>
@@ -3251,7 +3251,7 @@
           <p:cNvPr id="6" name="スライド番号プレースホルダー 5">
             <a:extLst>
               <a:ext uri="{FF2B5EF4-FFF2-40B4-BE49-F238E27FC236}">
-                <a16:creationId xmlns:a16="http://schemas.microsoft.com/office/drawing/2014/main" id="{2AF20E84-4383-D20F-329B-2562A610FE35}"/>
+                <a16:creationId xmlns:a16="http://schemas.microsoft.com/office/drawing/2014/main" id="{D17CCB8D-94BA-F333-1030-E7F1811206CC}"/>
               </a:ext>
             </a:extLst>
           </p:cNvPr>
@@ -3285,7 +3285,7 @@
             </a:lvl1pPr>
           </a:lstStyle>
           <a:p>
-            <a:fld id="{CC7124A5-1AAF-4F4C-9983-7B0A836199C1}" type="slidenum">
+            <a:fld id="{285FFB73-0918-41E0-A07F-0F7B1C9A2F21}" type="slidenum">
               <a:rPr kumimoji="1" lang="ja-JP" altLang="en-US" smtClean="0"/>
               <a:t>‹#›</a:t>
             </a:fld>
@@ -3296,7 +3296,7 @@
     </p:spTree>
     <p:extLst>
       <p:ext uri="{BB962C8B-B14F-4D97-AF65-F5344CB8AC3E}">
-        <p14:creationId xmlns:p14="http://schemas.microsoft.com/office/powerpoint/2010/main" val="2454232955"/>
+        <p14:creationId xmlns:p14="http://schemas.microsoft.com/office/powerpoint/2010/main" val="2266669037"/>
       </p:ext>
     </p:extLst>
   </p:cSld>
@@ -3619,7 +3619,7 @@
           <p:cNvPr id="2" name="テキスト ボックス 1">
             <a:extLst>
               <a:ext uri="{FF2B5EF4-FFF2-40B4-BE49-F238E27FC236}">
-                <a16:creationId xmlns:a16="http://schemas.microsoft.com/office/drawing/2014/main" id="{745AB5E0-B1A8-285E-DF1F-9FAD8106D196}"/>
+                <a16:creationId xmlns:a16="http://schemas.microsoft.com/office/drawing/2014/main" id="{885A4F8B-7374-2A4B-8CE8-C4CD67ACC401}"/>
               </a:ext>
             </a:extLst>
           </p:cNvPr>
@@ -3665,7 +3665,7 @@
           <p:cNvPr id="3" name="テキスト ボックス 2">
             <a:extLst>
               <a:ext uri="{FF2B5EF4-FFF2-40B4-BE49-F238E27FC236}">
-                <a16:creationId xmlns:a16="http://schemas.microsoft.com/office/drawing/2014/main" id="{5BE6AE40-BF7C-EB76-A4B3-51A7DAB87473}"/>
+                <a16:creationId xmlns:a16="http://schemas.microsoft.com/office/drawing/2014/main" id="{0065F925-428E-9BC8-EEA7-A90A3BF9F7FF}"/>
               </a:ext>
             </a:extLst>
           </p:cNvPr>
@@ -3714,7 +3714,7 @@
           <p:cNvPr id="4" name="テキスト ボックス 3">
             <a:extLst>
               <a:ext uri="{FF2B5EF4-FFF2-40B4-BE49-F238E27FC236}">
-                <a16:creationId xmlns:a16="http://schemas.microsoft.com/office/drawing/2014/main" id="{ACA5720C-6E14-EC34-7017-31761C126C6E}"/>
+                <a16:creationId xmlns:a16="http://schemas.microsoft.com/office/drawing/2014/main" id="{94021405-61A9-42C5-A528-87ACB10715C9}"/>
               </a:ext>
             </a:extLst>
           </p:cNvPr>
@@ -3754,7 +3754,7 @@
           <p:cNvPr id="5" name="テキスト ボックス 4">
             <a:extLst>
               <a:ext uri="{FF2B5EF4-FFF2-40B4-BE49-F238E27FC236}">
-                <a16:creationId xmlns:a16="http://schemas.microsoft.com/office/drawing/2014/main" id="{AB7F98B8-609A-5209-CB58-84E61B3AEF72}"/>
+                <a16:creationId xmlns:a16="http://schemas.microsoft.com/office/drawing/2014/main" id="{752E0275-BDBA-16ED-7E36-64A19C2A0DF0}"/>
               </a:ext>
             </a:extLst>
           </p:cNvPr>
@@ -3801,7 +3801,7 @@
             <a:hlinkClick r:id="" action="ppaction://media"/>
             <a:extLst>
               <a:ext uri="{FF2B5EF4-FFF2-40B4-BE49-F238E27FC236}">
-                <a16:creationId xmlns:a16="http://schemas.microsoft.com/office/drawing/2014/main" id="{BD963DE0-7BD2-B5A1-03A7-311A218661A9}"/>
+                <a16:creationId xmlns:a16="http://schemas.microsoft.com/office/drawing/2014/main" id="{BE657EF2-A495-B6A7-A94F-301841EE56A9}"/>
               </a:ext>
             </a:extLst>
           </p:cNvPr>
@@ -3836,7 +3836,7 @@
     </p:spTree>
     <p:extLst>
       <p:ext uri="{BB962C8B-B14F-4D97-AF65-F5344CB8AC3E}">
-        <p14:creationId xmlns:p14="http://schemas.microsoft.com/office/powerpoint/2010/main" val="3587487784"/>
+        <p14:creationId xmlns:p14="http://schemas.microsoft.com/office/powerpoint/2010/main" val="2148814749"/>
       </p:ext>
     </p:extLst>
   </p:cSld>
@@ -3960,7 +3960,7 @@
           <p:cNvPr id="2" name="テキスト ボックス 1">
             <a:extLst>
               <a:ext uri="{FF2B5EF4-FFF2-40B4-BE49-F238E27FC236}">
-                <a16:creationId xmlns:a16="http://schemas.microsoft.com/office/drawing/2014/main" id="{A30C7655-3BE5-8E9F-B021-C0CDFCFE8CFF}"/>
+                <a16:creationId xmlns:a16="http://schemas.microsoft.com/office/drawing/2014/main" id="{0AB56006-43CE-10AA-61DD-9AF55CFDCCF5}"/>
               </a:ext>
             </a:extLst>
           </p:cNvPr>
@@ -4006,7 +4006,7 @@
           <p:cNvPr id="3" name="テキスト ボックス 2">
             <a:extLst>
               <a:ext uri="{FF2B5EF4-FFF2-40B4-BE49-F238E27FC236}">
-                <a16:creationId xmlns:a16="http://schemas.microsoft.com/office/drawing/2014/main" id="{E6E24514-0DF7-327E-F352-62042A4A3CC6}"/>
+                <a16:creationId xmlns:a16="http://schemas.microsoft.com/office/drawing/2014/main" id="{B58242CA-87C3-A2C7-9607-CE3E478C21EF}"/>
               </a:ext>
             </a:extLst>
           </p:cNvPr>
@@ -4046,7 +4046,7 @@
           <p:cNvPr id="4" name="テキスト ボックス 3">
             <a:extLst>
               <a:ext uri="{FF2B5EF4-FFF2-40B4-BE49-F238E27FC236}">
-                <a16:creationId xmlns:a16="http://schemas.microsoft.com/office/drawing/2014/main" id="{915FFC88-FDAC-CFBF-00A3-B0B50CEB7062}"/>
+                <a16:creationId xmlns:a16="http://schemas.microsoft.com/office/drawing/2014/main" id="{B8F9EEB0-5341-228E-C7E5-B5B44E4506A5}"/>
               </a:ext>
             </a:extLst>
           </p:cNvPr>
@@ -4076,14 +4076,17 @@
                 </a:solidFill>
                 <a:latin typeface="Arial" panose="020B0604020202020204" pitchFamily="34" charset="0"/>
               </a:rPr>
-              <a:t>This is a Next</a:t>
-            </a:r>
-            <a:endParaRPr kumimoji="1" lang="ja-JP" altLang="en-US" sz="2000">
-              <a:solidFill>
-                <a:srgbClr val="333333"/>
-              </a:solidFill>
-              <a:latin typeface="Arial" panose="020B0604020202020204" pitchFamily="34" charset="0"/>
-            </a:endParaRPr>
+              <a:t>Hotpapi Web</a:t>
+            </a:r>
+            <a:r>
+              <a:rPr kumimoji="1" lang="ja-JP" altLang="en-US" sz="2000">
+                <a:solidFill>
+                  <a:srgbClr val="333333"/>
+                </a:solidFill>
+                <a:latin typeface="Arial" panose="020B0604020202020204" pitchFamily="34" charset="0"/>
+              </a:rPr>
+              <a:t>の目的、構成、実装を公開コードから確認できるプロジェクトです。</a:t>
+            </a:r>
           </a:p>
         </p:txBody>
       </p:sp>
@@ -4092,7 +4095,7 @@
           <p:cNvPr id="5" name="テキスト ボックス 4">
             <a:extLst>
               <a:ext uri="{FF2B5EF4-FFF2-40B4-BE49-F238E27FC236}">
-                <a16:creationId xmlns:a16="http://schemas.microsoft.com/office/drawing/2014/main" id="{BE168792-C062-9FA2-AF22-0F1729C370C4}"/>
+                <a16:creationId xmlns:a16="http://schemas.microsoft.com/office/drawing/2014/main" id="{6E4F5A58-6E63-024D-7599-ACB3F99E0AD4}"/>
               </a:ext>
             </a:extLst>
           </p:cNvPr>
@@ -4139,7 +4142,7 @@
             <a:hlinkClick r:id="" action="ppaction://media"/>
             <a:extLst>
               <a:ext uri="{FF2B5EF4-FFF2-40B4-BE49-F238E27FC236}">
-                <a16:creationId xmlns:a16="http://schemas.microsoft.com/office/drawing/2014/main" id="{B5004CE7-E0D0-9C74-5475-CFEEA3A193F8}"/>
+                <a16:creationId xmlns:a16="http://schemas.microsoft.com/office/drawing/2014/main" id="{4EFBC3E3-4730-A7F3-7B87-11159829DB04}"/>
               </a:ext>
             </a:extLst>
           </p:cNvPr>
@@ -4174,7 +4177,7 @@
     </p:spTree>
     <p:extLst>
       <p:ext uri="{BB962C8B-B14F-4D97-AF65-F5344CB8AC3E}">
-        <p14:creationId xmlns:p14="http://schemas.microsoft.com/office/powerpoint/2010/main" val="2202020064"/>
+        <p14:creationId xmlns:p14="http://schemas.microsoft.com/office/powerpoint/2010/main" val="1701977145"/>
       </p:ext>
     </p:extLst>
   </p:cSld>
@@ -4183,10 +4186,10 @@
   </p:clrMapOvr>
   <mc:AlternateContent xmlns:mc="http://schemas.openxmlformats.org/markup-compatibility/2006">
     <mc:Choice xmlns:p14="http://schemas.microsoft.com/office/powerpoint/2010/main" Requires="p14">
-      <p:transition spd="slow" p14:dur="2000" advTm="5000"/>
+      <p:transition spd="slow" p14:dur="2000" advTm="8000"/>
     </mc:Choice>
     <mc:Fallback>
-      <p:transition spd="slow" advTm="5000"/>
+      <p:transition spd="slow" advTm="8000"/>
     </mc:Fallback>
   </mc:AlternateContent>
   <p:timing>
@@ -4217,7 +4220,7 @@
                                   <p:childTnLst>
                                     <p:cmd type="call" cmd="playFrom(0.0)">
                                       <p:cBhvr>
-                                        <p:cTn id="6" dur="2148" fill="hold"/>
+                                        <p:cTn id="6" dur="7251" fill="hold"/>
                                         <p:tgtEl>
                                           <p:spTgt spid="6"/>
                                         </p:tgtEl>
@@ -4298,7 +4301,7 @@
           <p:cNvPr id="2" name="テキスト ボックス 1">
             <a:extLst>
               <a:ext uri="{FF2B5EF4-FFF2-40B4-BE49-F238E27FC236}">
-                <a16:creationId xmlns:a16="http://schemas.microsoft.com/office/drawing/2014/main" id="{F6078F8F-521E-11E9-453D-28C25FD8FA91}"/>
+                <a16:creationId xmlns:a16="http://schemas.microsoft.com/office/drawing/2014/main" id="{52BF89BC-6A2C-34C2-2D21-05DB0F346A4A}"/>
               </a:ext>
             </a:extLst>
           </p:cNvPr>
@@ -4344,7 +4347,7 @@
           <p:cNvPr id="3" name="テキスト ボックス 2">
             <a:extLst>
               <a:ext uri="{FF2B5EF4-FFF2-40B4-BE49-F238E27FC236}">
-                <a16:creationId xmlns:a16="http://schemas.microsoft.com/office/drawing/2014/main" id="{F54644EF-AFE2-85E6-6F72-FC6617F35B32}"/>
+                <a16:creationId xmlns:a16="http://schemas.microsoft.com/office/drawing/2014/main" id="{8C9D9D91-7CB0-AD6B-32E5-569C890BD8EC}"/>
               </a:ext>
             </a:extLst>
           </p:cNvPr>
@@ -4384,7 +4387,7 @@
           <p:cNvPr id="4" name="テキスト ボックス 3">
             <a:extLst>
               <a:ext uri="{FF2B5EF4-FFF2-40B4-BE49-F238E27FC236}">
-                <a16:creationId xmlns:a16="http://schemas.microsoft.com/office/drawing/2014/main" id="{0E533337-D7F8-715F-F619-6DEAC9B30478}"/>
+                <a16:creationId xmlns:a16="http://schemas.microsoft.com/office/drawing/2014/main" id="{986FD9E5-DE07-E34E-7FAA-1B4C440E27D1}"/>
               </a:ext>
             </a:extLst>
           </p:cNvPr>
@@ -4479,7 +4482,7 @@
           <p:cNvPr id="5" name="テキスト ボックス 4">
             <a:extLst>
               <a:ext uri="{FF2B5EF4-FFF2-40B4-BE49-F238E27FC236}">
-                <a16:creationId xmlns:a16="http://schemas.microsoft.com/office/drawing/2014/main" id="{1E0AC5E1-B03D-FA3C-293F-35F81C88E677}"/>
+                <a16:creationId xmlns:a16="http://schemas.microsoft.com/office/drawing/2014/main" id="{3542E8F9-D1F0-EFDB-E0B2-B93D93CF12B6}"/>
               </a:ext>
             </a:extLst>
           </p:cNvPr>
@@ -4526,7 +4529,7 @@
             <a:hlinkClick r:id="" action="ppaction://media"/>
             <a:extLst>
               <a:ext uri="{FF2B5EF4-FFF2-40B4-BE49-F238E27FC236}">
-                <a16:creationId xmlns:a16="http://schemas.microsoft.com/office/drawing/2014/main" id="{5CD21F43-00A3-0939-F668-387581E45FE7}"/>
+                <a16:creationId xmlns:a16="http://schemas.microsoft.com/office/drawing/2014/main" id="{B067A51B-5E32-1B81-BF7B-E2B5CAF3AE7E}"/>
               </a:ext>
             </a:extLst>
           </p:cNvPr>
@@ -4561,7 +4564,7 @@
     </p:spTree>
     <p:extLst>
       <p:ext uri="{BB962C8B-B14F-4D97-AF65-F5344CB8AC3E}">
-        <p14:creationId xmlns:p14="http://schemas.microsoft.com/office/powerpoint/2010/main" val="428458441"/>
+        <p14:creationId xmlns:p14="http://schemas.microsoft.com/office/powerpoint/2010/main" val="376766"/>
       </p:ext>
     </p:extLst>
   </p:cSld>
@@ -4685,7 +4688,7 @@
           <p:cNvPr id="2" name="テキスト ボックス 1">
             <a:extLst>
               <a:ext uri="{FF2B5EF4-FFF2-40B4-BE49-F238E27FC236}">
-                <a16:creationId xmlns:a16="http://schemas.microsoft.com/office/drawing/2014/main" id="{BD787363-2713-E868-CB55-A32BF978C105}"/>
+                <a16:creationId xmlns:a16="http://schemas.microsoft.com/office/drawing/2014/main" id="{3706BAC4-ECBF-752A-746B-913818C31455}"/>
               </a:ext>
             </a:extLst>
           </p:cNvPr>
@@ -4731,7 +4734,7 @@
           <p:cNvPr id="3" name="テキスト ボックス 2">
             <a:extLst>
               <a:ext uri="{FF2B5EF4-FFF2-40B4-BE49-F238E27FC236}">
-                <a16:creationId xmlns:a16="http://schemas.microsoft.com/office/drawing/2014/main" id="{6B41C19C-7A5F-DFF4-3EEB-89B412A4A37D}"/>
+                <a16:creationId xmlns:a16="http://schemas.microsoft.com/office/drawing/2014/main" id="{9679B270-5A99-7AEC-95EA-F16B99CAFA14}"/>
               </a:ext>
             </a:extLst>
           </p:cNvPr>
@@ -4771,7 +4774,7 @@
           <p:cNvPr id="4" name="テキスト ボックス 3">
             <a:extLst>
               <a:ext uri="{FF2B5EF4-FFF2-40B4-BE49-F238E27FC236}">
-                <a16:creationId xmlns:a16="http://schemas.microsoft.com/office/drawing/2014/main" id="{F87C1402-D8BF-ED9F-270A-0F1850D2DA37}"/>
+                <a16:creationId xmlns:a16="http://schemas.microsoft.com/office/drawing/2014/main" id="{55CAD9F1-610F-F310-A52F-A74827A93BDB}"/>
               </a:ext>
             </a:extLst>
           </p:cNvPr>
@@ -4881,7 +4884,7 @@
           <p:cNvPr id="5" name="テキスト ボックス 4">
             <a:extLst>
               <a:ext uri="{FF2B5EF4-FFF2-40B4-BE49-F238E27FC236}">
-                <a16:creationId xmlns:a16="http://schemas.microsoft.com/office/drawing/2014/main" id="{B80087A1-D166-0279-5959-5E89E1A45DA2}"/>
+                <a16:creationId xmlns:a16="http://schemas.microsoft.com/office/drawing/2014/main" id="{DA4EE8EC-4F19-20B7-1479-3440233AF56F}"/>
               </a:ext>
             </a:extLst>
           </p:cNvPr>
@@ -4928,7 +4931,7 @@
             <a:hlinkClick r:id="" action="ppaction://media"/>
             <a:extLst>
               <a:ext uri="{FF2B5EF4-FFF2-40B4-BE49-F238E27FC236}">
-                <a16:creationId xmlns:a16="http://schemas.microsoft.com/office/drawing/2014/main" id="{92DD5793-271B-DEC6-33A7-55F9DE5FFA82}"/>
+                <a16:creationId xmlns:a16="http://schemas.microsoft.com/office/drawing/2014/main" id="{7458DCDB-FC97-233C-BD02-30BFE14E95D8}"/>
               </a:ext>
             </a:extLst>
           </p:cNvPr>
@@ -4963,7 +4966,7 @@
     </p:spTree>
     <p:extLst>
       <p:ext uri="{BB962C8B-B14F-4D97-AF65-F5344CB8AC3E}">
-        <p14:creationId xmlns:p14="http://schemas.microsoft.com/office/powerpoint/2010/main" val="3629021548"/>
+        <p14:creationId xmlns:p14="http://schemas.microsoft.com/office/powerpoint/2010/main" val="743518466"/>
       </p:ext>
     </p:extLst>
   </p:cSld>
@@ -5087,7 +5090,7 @@
           <p:cNvPr id="2" name="テキスト ボックス 1">
             <a:extLst>
               <a:ext uri="{FF2B5EF4-FFF2-40B4-BE49-F238E27FC236}">
-                <a16:creationId xmlns:a16="http://schemas.microsoft.com/office/drawing/2014/main" id="{9B67BE89-6D2D-5A6D-BA63-02A1C15BF6E8}"/>
+                <a16:creationId xmlns:a16="http://schemas.microsoft.com/office/drawing/2014/main" id="{DA9E1AF9-0C59-D624-0346-0155FDC7EE50}"/>
               </a:ext>
             </a:extLst>
           </p:cNvPr>
@@ -5133,7 +5136,7 @@
           <p:cNvPr id="3" name="テキスト ボックス 2">
             <a:extLst>
               <a:ext uri="{FF2B5EF4-FFF2-40B4-BE49-F238E27FC236}">
-                <a16:creationId xmlns:a16="http://schemas.microsoft.com/office/drawing/2014/main" id="{4EBAFD52-3634-15E0-FD64-349083A7B02B}"/>
+                <a16:creationId xmlns:a16="http://schemas.microsoft.com/office/drawing/2014/main" id="{824B0F40-204A-DFB3-8E07-237A31B5855A}"/>
               </a:ext>
             </a:extLst>
           </p:cNvPr>
@@ -5173,7 +5176,7 @@
           <p:cNvPr id="4" name="テキスト ボックス 3">
             <a:extLst>
               <a:ext uri="{FF2B5EF4-FFF2-40B4-BE49-F238E27FC236}">
-                <a16:creationId xmlns:a16="http://schemas.microsoft.com/office/drawing/2014/main" id="{DD26E119-FA77-4F74-EC4B-5F7E26EDA973}"/>
+                <a16:creationId xmlns:a16="http://schemas.microsoft.com/office/drawing/2014/main" id="{00A872E2-F6A1-1115-61CC-353439CAFCC6}"/>
               </a:ext>
             </a:extLst>
           </p:cNvPr>
@@ -5197,20 +5200,14 @@
           <a:lstStyle/>
           <a:p>
             <a:r>
-              <a:rPr kumimoji="1" lang="en-US" altLang="ja-JP" sz="2000">
+              <a:rPr kumimoji="1" lang="ja-JP" altLang="en-US" sz="2000">
                 <a:solidFill>
                   <a:srgbClr val="333333"/>
                 </a:solidFill>
                 <a:latin typeface="Arial" panose="020B0604020202020204" pitchFamily="34" charset="0"/>
               </a:rPr>
-              <a:t>Fix silently-broken budget filter codes (B004/B005/B006 no longer exist)</a:t>
-            </a:r>
-            <a:endParaRPr kumimoji="1" lang="ja-JP" altLang="en-US" sz="2000">
-              <a:solidFill>
-                <a:srgbClr val="333333"/>
-              </a:solidFill>
-              <a:latin typeface="Arial" panose="020B0604020202020204" pitchFamily="34" charset="0"/>
-            </a:endParaRPr>
+              <a:t>直近のコミットでは、不具合修正と安定性向上が行われました。</a:t>
+            </a:r>
           </a:p>
         </p:txBody>
       </p:sp>
@@ -5219,7 +5216,7 @@
           <p:cNvPr id="5" name="テキスト ボックス 4">
             <a:extLst>
               <a:ext uri="{FF2B5EF4-FFF2-40B4-BE49-F238E27FC236}">
-                <a16:creationId xmlns:a16="http://schemas.microsoft.com/office/drawing/2014/main" id="{5287C600-8EA9-F303-6AAE-B4161234329E}"/>
+                <a16:creationId xmlns:a16="http://schemas.microsoft.com/office/drawing/2014/main" id="{FCF11328-7956-9A82-789B-E7F90E746373}"/>
               </a:ext>
             </a:extLst>
           </p:cNvPr>
@@ -5266,7 +5263,7 @@
             <a:hlinkClick r:id="" action="ppaction://media"/>
             <a:extLst>
               <a:ext uri="{FF2B5EF4-FFF2-40B4-BE49-F238E27FC236}">
-                <a16:creationId xmlns:a16="http://schemas.microsoft.com/office/drawing/2014/main" id="{9FD37D03-482F-FB07-C95E-C16BCA03D94F}"/>
+                <a16:creationId xmlns:a16="http://schemas.microsoft.com/office/drawing/2014/main" id="{099EE37A-4E31-F9E1-8578-E2FA90C67E21}"/>
               </a:ext>
             </a:extLst>
           </p:cNvPr>
@@ -5301,7 +5298,7 @@
     </p:spTree>
     <p:extLst>
       <p:ext uri="{BB962C8B-B14F-4D97-AF65-F5344CB8AC3E}">
-        <p14:creationId xmlns:p14="http://schemas.microsoft.com/office/powerpoint/2010/main" val="274053672"/>
+        <p14:creationId xmlns:p14="http://schemas.microsoft.com/office/powerpoint/2010/main" val="3450340680"/>
       </p:ext>
     </p:extLst>
   </p:cSld>
@@ -5310,10 +5307,10 @@
   </p:clrMapOvr>
   <mc:AlternateContent xmlns:mc="http://schemas.openxmlformats.org/markup-compatibility/2006">
     <mc:Choice xmlns:p14="http://schemas.microsoft.com/office/powerpoint/2010/main" Requires="p14">
-      <p:transition spd="slow" p14:dur="2000" advTm="12000"/>
+      <p:transition spd="slow" p14:dur="2000" advTm="6000"/>
     </mc:Choice>
     <mc:Fallback>
-      <p:transition spd="slow" advTm="12000"/>
+      <p:transition spd="slow" advTm="6000"/>
     </mc:Fallback>
   </mc:AlternateContent>
   <p:timing>
@@ -5344,7 +5341,7 @@
                                   <p:childTnLst>
                                     <p:cmd type="call" cmd="playFrom(0.0)">
                                       <p:cBhvr>
-                                        <p:cTn id="6" dur="11739" fill="hold"/>
+                                        <p:cTn id="6" dur="5771" fill="hold"/>
                                         <p:tgtEl>
                                           <p:spTgt spid="6"/>
                                         </p:tgtEl>
@@ -5425,7 +5422,7 @@
           <p:cNvPr id="2" name="テキスト ボックス 1">
             <a:extLst>
               <a:ext uri="{FF2B5EF4-FFF2-40B4-BE49-F238E27FC236}">
-                <a16:creationId xmlns:a16="http://schemas.microsoft.com/office/drawing/2014/main" id="{DD39E04A-AF17-418B-A9AD-6F1C71F87EF6}"/>
+                <a16:creationId xmlns:a16="http://schemas.microsoft.com/office/drawing/2014/main" id="{7550CF95-46F0-4E85-6A18-8D20E27D1AB1}"/>
               </a:ext>
             </a:extLst>
           </p:cNvPr>
@@ -5471,7 +5468,7 @@
           <p:cNvPr id="3" name="テキスト ボックス 2">
             <a:extLst>
               <a:ext uri="{FF2B5EF4-FFF2-40B4-BE49-F238E27FC236}">
-                <a16:creationId xmlns:a16="http://schemas.microsoft.com/office/drawing/2014/main" id="{48238BBA-3046-7D35-ABD3-ADC8CBAE19A5}"/>
+                <a16:creationId xmlns:a16="http://schemas.microsoft.com/office/drawing/2014/main" id="{DBEA0229-9BF8-06C7-5E0A-7060A0FA66A0}"/>
               </a:ext>
             </a:extLst>
           </p:cNvPr>
@@ -5511,7 +5508,7 @@
           <p:cNvPr id="4" name="テキスト ボックス 3">
             <a:extLst>
               <a:ext uri="{FF2B5EF4-FFF2-40B4-BE49-F238E27FC236}">
-                <a16:creationId xmlns:a16="http://schemas.microsoft.com/office/drawing/2014/main" id="{7739F450-36CF-E3B0-685B-2518CB30C97F}"/>
+                <a16:creationId xmlns:a16="http://schemas.microsoft.com/office/drawing/2014/main" id="{A82128B7-2BBB-B66D-4669-C869230EE1BB}"/>
               </a:ext>
             </a:extLst>
           </p:cNvPr>
@@ -5576,7 +5573,7 @@
           <p:cNvPr id="5" name="テキスト ボックス 4">
             <a:extLst>
               <a:ext uri="{FF2B5EF4-FFF2-40B4-BE49-F238E27FC236}">
-                <a16:creationId xmlns:a16="http://schemas.microsoft.com/office/drawing/2014/main" id="{564E64F8-CC02-C1EC-7409-DC3E0597EDC2}"/>
+                <a16:creationId xmlns:a16="http://schemas.microsoft.com/office/drawing/2014/main" id="{28CF71C3-E65B-0899-EE46-1286BFD27113}"/>
               </a:ext>
             </a:extLst>
           </p:cNvPr>
@@ -5623,7 +5620,7 @@
             <a:hlinkClick r:id="" action="ppaction://media"/>
             <a:extLst>
               <a:ext uri="{FF2B5EF4-FFF2-40B4-BE49-F238E27FC236}">
-                <a16:creationId xmlns:a16="http://schemas.microsoft.com/office/drawing/2014/main" id="{246C2201-D45C-0AA9-C389-B55455ED3DCC}"/>
+                <a16:creationId xmlns:a16="http://schemas.microsoft.com/office/drawing/2014/main" id="{4994FCA1-C0E7-835E-213C-4194A8D689B6}"/>
               </a:ext>
             </a:extLst>
           </p:cNvPr>
@@ -5658,7 +5655,7 @@
     </p:spTree>
     <p:extLst>
       <p:ext uri="{BB962C8B-B14F-4D97-AF65-F5344CB8AC3E}">
-        <p14:creationId xmlns:p14="http://schemas.microsoft.com/office/powerpoint/2010/main" val="1037380376"/>
+        <p14:creationId xmlns:p14="http://schemas.microsoft.com/office/powerpoint/2010/main" val="3760885566"/>
       </p:ext>
     </p:extLst>
   </p:cSld>
